--- a/ゲーム科2年/00_前期/ゲーム開発Ⅲ/ゲーム物理学/座学/27_回転運動.pptx
+++ b/ゲーム科2年/00_前期/ゲーム開発Ⅲ/ゲーム物理学/座学/27_回転運動.pptx
@@ -3849,8 +3849,8 @@
           </a:p>
         </p:txBody>
       </p:sp>
-      <mc:AlternateContent xmlns:mc="http://schemas.openxmlformats.org/markup-compatibility/2006">
-        <mc:Choice xmlns:a14="http://schemas.microsoft.com/office/drawing/2010/main" Requires="a14">
+      <mc:AlternateContent xmlns:mc="http://schemas.openxmlformats.org/markup-compatibility/2006" xmlns:a14="http://schemas.microsoft.com/office/drawing/2010/main">
+        <mc:Choice Requires="a14">
           <p:sp>
             <p:nvSpPr>
               <p:cNvPr id="6" name="テキスト ボックス 5">
@@ -4048,7 +4048,7 @@
             </p:txBody>
           </p:sp>
         </mc:Choice>
-        <mc:Fallback>
+        <mc:Fallback xmlns="">
           <p:sp>
             <p:nvSpPr>
               <p:cNvPr id="6" name="テキスト ボックス 5">
@@ -4093,8 +4093,8 @@
           </p:sp>
         </mc:Fallback>
       </mc:AlternateContent>
-      <mc:AlternateContent xmlns:mc="http://schemas.openxmlformats.org/markup-compatibility/2006">
-        <mc:Choice xmlns:a14="http://schemas.microsoft.com/office/drawing/2010/main" Requires="a14">
+      <mc:AlternateContent xmlns:mc="http://schemas.openxmlformats.org/markup-compatibility/2006" xmlns:a14="http://schemas.microsoft.com/office/drawing/2010/main">
+        <mc:Choice Requires="a14">
           <p:graphicFrame>
             <p:nvGraphicFramePr>
               <p:cNvPr id="2" name="表 2">
@@ -4293,13 +4293,7 @@
                                 <a:rPr kumimoji="1" lang="en-US" altLang="ja-JP" b="0" i="1" smtClean="0">
                                   <a:latin typeface="Cambria Math" panose="02040503050406030204" pitchFamily="18" charset="0"/>
                                 </a:rPr>
-                                <m:t>=</m:t>
-                              </m:r>
-                              <m:r>
-                                <a:rPr kumimoji="1" lang="en-US" altLang="ja-JP" b="0" i="1" smtClean="0">
-                                  <a:latin typeface="Cambria Math" panose="02040503050406030204" pitchFamily="18" charset="0"/>
-                                </a:rPr>
-                                <m:t>3</m:t>
+                                <m:t>=3</m:t>
                               </m:r>
                               <m:r>
                                 <a:rPr kumimoji="1" lang="ja-JP" altLang="en-US" b="0" i="1" smtClean="0">
@@ -4430,7 +4424,7 @@
             </a:graphic>
           </p:graphicFrame>
         </mc:Choice>
-        <mc:Fallback>
+        <mc:Fallback xmlns="">
           <p:graphicFrame>
             <p:nvGraphicFramePr>
               <p:cNvPr id="2" name="表 2">
@@ -4691,8 +4685,8 @@
           </a:p>
         </p:txBody>
       </p:sp>
-      <mc:AlternateContent xmlns:mc="http://schemas.openxmlformats.org/markup-compatibility/2006">
-        <mc:Choice xmlns:a14="http://schemas.microsoft.com/office/drawing/2010/main" Requires="a14">
+      <mc:AlternateContent xmlns:mc="http://schemas.openxmlformats.org/markup-compatibility/2006" xmlns:a14="http://schemas.microsoft.com/office/drawing/2010/main">
+        <mc:Choice Requires="a14">
           <p:sp>
             <p:nvSpPr>
               <p:cNvPr id="6" name="テキスト ボックス 5">
@@ -5017,31 +5011,37 @@
                       <a:rPr lang="en-US" altLang="ja-JP" sz="2400" b="0" i="1" smtClean="0">
                         <a:latin typeface="Cambria Math" panose="02040503050406030204" pitchFamily="18" charset="0"/>
                       </a:rPr>
-                      <m:t>=</m:t>
+                      <m:t>=(</m:t>
+                    </m:r>
+                    <m:r>
+                      <a:rPr lang="en-US" altLang="ja-JP" sz="2400" i="1" smtClean="0">
+                        <a:latin typeface="Cambria Math" panose="02040503050406030204" pitchFamily="18" charset="0"/>
+                      </a:rPr>
+                      <m:t>8</m:t>
                     </m:r>
                     <m:r>
                       <a:rPr lang="en-US" altLang="ja-JP" sz="2400" b="0" i="1" smtClean="0">
                         <a:latin typeface="Cambria Math" panose="02040503050406030204" pitchFamily="18" charset="0"/>
                       </a:rPr>
-                      <m:t>(</m:t>
-                    </m:r>
-                    <m:r>
-                      <a:rPr lang="en-US" altLang="ja-JP" sz="2400" i="1" smtClean="0">
-                        <a:latin typeface="Cambria Math" panose="02040503050406030204" pitchFamily="18" charset="0"/>
-                      </a:rPr>
-                      <m:t>8</m:t>
+                      <m:t>𝑟𝑎𝑑</m:t>
                     </m:r>
                     <m:r>
                       <a:rPr lang="en-US" altLang="ja-JP" sz="2400" b="0" i="1" smtClean="0">
                         <a:latin typeface="Cambria Math" panose="02040503050406030204" pitchFamily="18" charset="0"/>
                       </a:rPr>
-                      <m:t>𝑟𝑎𝑑</m:t>
+                      <m:t>/</m:t>
+                    </m:r>
+                    <m:r>
+                      <a:rPr lang="ja-JP" altLang="en-US" sz="2400" i="1">
+                        <a:latin typeface="Cambria Math" panose="02040503050406030204" pitchFamily="18" charset="0"/>
+                      </a:rPr>
+                      <m:t>秒</m:t>
                     </m:r>
                     <m:r>
                       <a:rPr lang="en-US" altLang="ja-JP" sz="2400" b="0" i="1" smtClean="0">
                         <a:latin typeface="Cambria Math" panose="02040503050406030204" pitchFamily="18" charset="0"/>
                       </a:rPr>
-                      <m:t>/</m:t>
+                      <m:t>)(3</m:t>
                     </m:r>
                     <m:r>
                       <a:rPr lang="ja-JP" altLang="en-US" sz="2400" i="1">
@@ -5053,25 +5053,7 @@
                       <a:rPr lang="en-US" altLang="ja-JP" sz="2400" b="0" i="1" smtClean="0">
                         <a:latin typeface="Cambria Math" panose="02040503050406030204" pitchFamily="18" charset="0"/>
                       </a:rPr>
-                      <m:t>)(3</m:t>
-                    </m:r>
-                    <m:r>
-                      <a:rPr lang="ja-JP" altLang="en-US" sz="2400" i="1">
-                        <a:latin typeface="Cambria Math" panose="02040503050406030204" pitchFamily="18" charset="0"/>
-                      </a:rPr>
-                      <m:t>秒</m:t>
-                    </m:r>
-                    <m:r>
-                      <a:rPr lang="en-US" altLang="ja-JP" sz="2400" b="0" i="1" smtClean="0">
-                        <a:latin typeface="Cambria Math" panose="02040503050406030204" pitchFamily="18" charset="0"/>
-                      </a:rPr>
-                      <m:t>)</m:t>
-                    </m:r>
-                    <m:r>
-                      <a:rPr lang="en-US" altLang="ja-JP" sz="2400" b="0" i="1" smtClean="0">
-                        <a:latin typeface="Cambria Math" panose="02040503050406030204" pitchFamily="18" charset="0"/>
-                      </a:rPr>
-                      <m:t>+</m:t>
+                      <m:t>)+</m:t>
                     </m:r>
                     <m:f>
                       <m:fPr>
@@ -5274,7 +5256,7 @@
             </p:txBody>
           </p:sp>
         </mc:Choice>
-        <mc:Fallback>
+        <mc:Fallback xmlns="">
           <p:sp>
             <p:nvSpPr>
               <p:cNvPr id="6" name="テキスト ボックス 5">
@@ -5385,8 +5367,8 @@
           </a:p>
         </p:txBody>
       </p:sp>
-      <mc:AlternateContent xmlns:mc="http://schemas.openxmlformats.org/markup-compatibility/2006">
-        <mc:Choice xmlns:a14="http://schemas.microsoft.com/office/drawing/2010/main" Requires="a14">
+      <mc:AlternateContent xmlns:mc="http://schemas.openxmlformats.org/markup-compatibility/2006" xmlns:a14="http://schemas.microsoft.com/office/drawing/2010/main">
+        <mc:Choice Requires="a14">
           <p:sp>
             <p:nvSpPr>
               <p:cNvPr id="6" name="テキスト ボックス 5">
@@ -5658,7 +5640,7 @@
             </p:txBody>
           </p:sp>
         </mc:Choice>
-        <mc:Fallback>
+        <mc:Fallback xmlns="">
           <p:sp>
             <p:nvSpPr>
               <p:cNvPr id="6" name="テキスト ボックス 5">
@@ -6673,8 +6655,8 @@
             </p:txBody>
           </p:sp>
         </p:grpSp>
-        <mc:AlternateContent xmlns:mc="http://schemas.openxmlformats.org/markup-compatibility/2006">
-          <mc:Choice xmlns:a14="http://schemas.microsoft.com/office/drawing/2010/main" Requires="a14">
+        <mc:AlternateContent xmlns:mc="http://schemas.openxmlformats.org/markup-compatibility/2006" xmlns:a14="http://schemas.microsoft.com/office/drawing/2010/main">
+          <mc:Choice Requires="a14">
             <p:sp>
               <p:nvSpPr>
                 <p:cNvPr id="3" name="テキスト ボックス 2">
@@ -6703,6 +6685,7 @@
                 </a:bodyPr>
                 <a:lstStyle/>
                 <a:p>
+                  <a:pPr/>
                   <a14:m>
                     <m:oMathPara xmlns:m="http://schemas.openxmlformats.org/officeDocument/2006/math">
                       <m:oMathParaPr>
@@ -6730,7 +6713,7 @@
               </p:txBody>
             </p:sp>
           </mc:Choice>
-          <mc:Fallback>
+          <mc:Fallback xmlns="">
             <p:sp>
               <p:nvSpPr>
                 <p:cNvPr id="3" name="テキスト ボックス 2">
@@ -6775,8 +6758,8 @@
             </p:sp>
           </mc:Fallback>
         </mc:AlternateContent>
-        <mc:AlternateContent xmlns:mc="http://schemas.openxmlformats.org/markup-compatibility/2006">
-          <mc:Choice xmlns:a14="http://schemas.microsoft.com/office/drawing/2010/main" Requires="a14">
+        <mc:AlternateContent xmlns:mc="http://schemas.openxmlformats.org/markup-compatibility/2006" xmlns:a14="http://schemas.microsoft.com/office/drawing/2010/main">
+          <mc:Choice Requires="a14">
             <p:sp>
               <p:nvSpPr>
                 <p:cNvPr id="17" name="テキスト ボックス 16">
@@ -6805,6 +6788,7 @@
                 </a:bodyPr>
                 <a:lstStyle/>
                 <a:p>
+                  <a:pPr/>
                   <a14:m>
                     <m:oMathPara xmlns:m="http://schemas.openxmlformats.org/officeDocument/2006/math">
                       <m:oMathParaPr>
@@ -6832,7 +6816,7 @@
               </p:txBody>
             </p:sp>
           </mc:Choice>
-          <mc:Fallback>
+          <mc:Fallback xmlns="">
             <p:sp>
               <p:nvSpPr>
                 <p:cNvPr id="17" name="テキスト ボックス 16">
@@ -6877,8 +6861,8 @@
             </p:sp>
           </mc:Fallback>
         </mc:AlternateContent>
-        <mc:AlternateContent xmlns:mc="http://schemas.openxmlformats.org/markup-compatibility/2006">
-          <mc:Choice xmlns:a14="http://schemas.microsoft.com/office/drawing/2010/main" Requires="a14">
+        <mc:AlternateContent xmlns:mc="http://schemas.openxmlformats.org/markup-compatibility/2006" xmlns:a14="http://schemas.microsoft.com/office/drawing/2010/main">
+          <mc:Choice Requires="a14">
             <p:sp>
               <p:nvSpPr>
                 <p:cNvPr id="18" name="テキスト ボックス 17">
@@ -6907,6 +6891,7 @@
                 </a:bodyPr>
                 <a:lstStyle/>
                 <a:p>
+                  <a:pPr/>
                   <a14:m>
                     <m:oMathPara xmlns:m="http://schemas.openxmlformats.org/officeDocument/2006/math">
                       <m:oMathParaPr>
@@ -6937,7 +6922,7 @@
               </p:txBody>
             </p:sp>
           </mc:Choice>
-          <mc:Fallback>
+          <mc:Fallback xmlns="">
             <p:sp>
               <p:nvSpPr>
                 <p:cNvPr id="18" name="テキスト ボックス 17">
@@ -7103,8 +7088,8 @@
           </a:p>
         </p:txBody>
       </p:sp>
-      <mc:AlternateContent xmlns:mc="http://schemas.openxmlformats.org/markup-compatibility/2006">
-        <mc:Choice xmlns:a14="http://schemas.microsoft.com/office/drawing/2010/main" Requires="a14">
+      <mc:AlternateContent xmlns:mc="http://schemas.openxmlformats.org/markup-compatibility/2006" xmlns:a14="http://schemas.microsoft.com/office/drawing/2010/main">
+        <mc:Choice Requires="a14">
           <p:sp>
             <p:nvSpPr>
               <p:cNvPr id="6" name="テキスト ボックス 5">
@@ -7289,7 +7274,7 @@
             </p:txBody>
           </p:sp>
         </mc:Choice>
-        <mc:Fallback>
+        <mc:Fallback xmlns="">
           <p:sp>
             <p:nvSpPr>
               <p:cNvPr id="6" name="テキスト ボックス 5">
@@ -7378,7 +7363,7 @@
         </p:nvSpPr>
         <p:spPr>
           <a:xfrm>
-            <a:off x="321734" y="2146074"/>
+            <a:off x="287868" y="2527074"/>
             <a:ext cx="4470399" cy="2747659"/>
           </a:xfrm>
           <a:prstGeom prst="roundRect">
@@ -7454,8 +7439,8 @@
           </a:p>
         </p:txBody>
       </p:sp>
-      <mc:AlternateContent xmlns:mc="http://schemas.openxmlformats.org/markup-compatibility/2006">
-        <mc:Choice xmlns:a14="http://schemas.microsoft.com/office/drawing/2010/main" Requires="a14">
+      <mc:AlternateContent xmlns:mc="http://schemas.openxmlformats.org/markup-compatibility/2006" xmlns:a14="http://schemas.microsoft.com/office/drawing/2010/main">
+        <mc:Choice Requires="a14">
           <p:sp>
             <p:nvSpPr>
               <p:cNvPr id="6" name="テキスト ボックス 5">
@@ -7471,7 +7456,7 @@
             <p:spPr>
               <a:xfrm>
                 <a:off x="567542" y="1216429"/>
-                <a:ext cx="5995552" cy="3613040"/>
+                <a:ext cx="7263527" cy="3982372"/>
               </a:xfrm>
               <a:prstGeom prst="rect">
                 <a:avLst/>
@@ -7493,7 +7478,22 @@
               <a:p>
                 <a:r>
                   <a:rPr lang="ja-JP" altLang="en-US" sz="2400" dirty="0"/>
-                  <a:t>回転運動による移動にも時間が伴います。</a:t>
+                  <a:t>回転運動も時間が経つにつれての移動になります。</a:t>
+                </a:r>
+                <a:endParaRPr lang="en-US" altLang="ja-JP" sz="2400" dirty="0"/>
+              </a:p>
+              <a:p>
+                <a:r>
+                  <a:rPr lang="ja-JP" altLang="en-US" sz="2400" dirty="0"/>
+                  <a:t>つまり変位</a:t>
+                </a:r>
+                <a:r>
+                  <a:rPr lang="en-US" altLang="ja-JP" sz="2400" dirty="0"/>
+                  <a:t>÷</a:t>
+                </a:r>
+                <a:r>
+                  <a:rPr lang="ja-JP" altLang="en-US" sz="2400" dirty="0"/>
+                  <a:t>時間が速度です。</a:t>
                 </a:r>
                 <a:endParaRPr lang="en-US" altLang="ja-JP" sz="2400" dirty="0"/>
               </a:p>
@@ -7760,7 +7760,7 @@
             </p:txBody>
           </p:sp>
         </mc:Choice>
-        <mc:Fallback>
+        <mc:Fallback xmlns="">
           <p:sp>
             <p:nvSpPr>
               <p:cNvPr id="6" name="テキスト ボックス 5">
@@ -7778,7 +7778,7 @@
             <p:spPr>
               <a:xfrm>
                 <a:off x="567542" y="1216429"/>
-                <a:ext cx="5995552" cy="3613040"/>
+                <a:ext cx="7263527" cy="3982372"/>
               </a:xfrm>
               <a:prstGeom prst="rect">
                 <a:avLst/>
@@ -7786,7 +7786,7 @@
               <a:blipFill>
                 <a:blip r:embed="rId2"/>
                 <a:stretch>
-                  <a:fillRect l="-1524" t="-1351" r="-1220" b="-3041"/>
+                  <a:fillRect l="-1258" t="-1225" r="-336" b="-2603"/>
                 </a:stretch>
               </a:blipFill>
             </p:spPr>
@@ -7871,8 +7871,8 @@
           </a:p>
         </p:txBody>
       </p:sp>
-      <mc:AlternateContent xmlns:mc="http://schemas.openxmlformats.org/markup-compatibility/2006">
-        <mc:Choice xmlns:a14="http://schemas.microsoft.com/office/drawing/2010/main" Requires="a14">
+      <mc:AlternateContent xmlns:mc="http://schemas.openxmlformats.org/markup-compatibility/2006" xmlns:a14="http://schemas.microsoft.com/office/drawing/2010/main">
+        <mc:Choice Requires="a14">
           <p:sp>
             <p:nvSpPr>
               <p:cNvPr id="6" name="テキスト ボックス 5">
@@ -8364,7 +8364,7 @@
             </p:txBody>
           </p:sp>
         </mc:Choice>
-        <mc:Fallback>
+        <mc:Fallback xmlns="">
           <p:sp>
             <p:nvSpPr>
               <p:cNvPr id="6" name="テキスト ボックス 5">
@@ -8409,8 +8409,8 @@
           </p:sp>
         </mc:Fallback>
       </mc:AlternateContent>
-      <mc:AlternateContent xmlns:mc="http://schemas.openxmlformats.org/markup-compatibility/2006">
-        <mc:Choice xmlns:a14="http://schemas.microsoft.com/office/drawing/2010/main" Requires="a14">
+      <mc:AlternateContent xmlns:mc="http://schemas.openxmlformats.org/markup-compatibility/2006" xmlns:a14="http://schemas.microsoft.com/office/drawing/2010/main">
+        <mc:Choice Requires="a14">
           <p:sp>
             <p:nvSpPr>
               <p:cNvPr id="7" name="テキスト ボックス 6">
@@ -8512,7 +8512,7 @@
             </p:txBody>
           </p:sp>
         </mc:Choice>
-        <mc:Fallback>
+        <mc:Fallback xmlns="">
           <p:sp>
             <p:nvSpPr>
               <p:cNvPr id="7" name="テキスト ボックス 6">
@@ -8694,7 +8694,7 @@
             <p:spPr>
               <a:xfrm>
                 <a:off x="567542" y="1216429"/>
-                <a:ext cx="10649069" cy="3935436"/>
+                <a:ext cx="9725739" cy="3935436"/>
               </a:xfrm>
               <a:prstGeom prst="rect">
                 <a:avLst/>
@@ -8716,7 +8716,7 @@
               <a:p>
                 <a:r>
                   <a:rPr lang="ja-JP" altLang="en-US" sz="2400" dirty="0"/>
-                  <a:t>徐々に回転が速くなったり、遅くなったりすることは日常でもありますね。</a:t>
+                  <a:t>ルーレットを回すと徐々に回転が遅くなり、やがて止まりますよね。</a:t>
                 </a:r>
                 <a:endParaRPr lang="en-US" altLang="ja-JP" sz="2400" dirty="0"/>
               </a:p>
@@ -9026,7 +9026,7 @@
             <p:spPr>
               <a:xfrm>
                 <a:off x="567542" y="1216429"/>
-                <a:ext cx="10649069" cy="3935436"/>
+                <a:ext cx="9725739" cy="3935436"/>
               </a:xfrm>
               <a:prstGeom prst="rect">
                 <a:avLst/>
@@ -9034,7 +9034,7 @@
               <a:blipFill>
                 <a:blip r:embed="rId2"/>
                 <a:stretch>
-                  <a:fillRect l="-859" t="-1240" b="-2791"/>
+                  <a:fillRect l="-940" t="-1240" b="-2791"/>
                 </a:stretch>
               </a:blipFill>
             </p:spPr>
@@ -9119,8 +9119,8 @@
           </a:p>
         </p:txBody>
       </p:sp>
-      <mc:AlternateContent xmlns:mc="http://schemas.openxmlformats.org/markup-compatibility/2006">
-        <mc:Choice xmlns:a14="http://schemas.microsoft.com/office/drawing/2010/main" Requires="a14">
+      <mc:AlternateContent xmlns:mc="http://schemas.openxmlformats.org/markup-compatibility/2006" xmlns:a14="http://schemas.microsoft.com/office/drawing/2010/main">
+        <mc:Choice Requires="a14">
           <p:sp>
             <p:nvSpPr>
               <p:cNvPr id="6" name="テキスト ボックス 5">
@@ -9280,13 +9280,7 @@
                       <a:rPr lang="en-US" altLang="ja-JP" sz="2400" b="0" i="1" smtClean="0">
                         <a:latin typeface="Cambria Math" panose="02040503050406030204" pitchFamily="18" charset="0"/>
                       </a:rPr>
-                      <m:t>=</m:t>
-                    </m:r>
-                    <m:r>
-                      <a:rPr lang="en-US" altLang="ja-JP" sz="2400" b="0" i="1" smtClean="0">
-                        <a:latin typeface="Cambria Math" panose="02040503050406030204" pitchFamily="18" charset="0"/>
-                      </a:rPr>
-                      <m:t>12</m:t>
+                      <m:t>=12</m:t>
                     </m:r>
                     <m:r>
                       <m:rPr>
@@ -9491,13 +9485,7 @@
                           <a:rPr lang="en-US" altLang="ja-JP" sz="2400" b="0" i="1" smtClean="0">
                             <a:latin typeface="Cambria Math" panose="02040503050406030204" pitchFamily="18" charset="0"/>
                           </a:rPr>
-                          <m:t>−</m:t>
-                        </m:r>
-                        <m:r>
-                          <a:rPr lang="en-US" altLang="ja-JP" sz="2400" b="0" i="1" smtClean="0">
-                            <a:latin typeface="Cambria Math" panose="02040503050406030204" pitchFamily="18" charset="0"/>
-                          </a:rPr>
-                          <m:t>12</m:t>
+                          <m:t>−12</m:t>
                         </m:r>
                         <m:r>
                           <m:rPr>
@@ -9757,7 +9745,7 @@
             </p:txBody>
           </p:sp>
         </mc:Choice>
-        <mc:Fallback>
+        <mc:Fallback xmlns="">
           <p:sp>
             <p:nvSpPr>
               <p:cNvPr id="6" name="テキスト ボックス 5">
@@ -9922,8 +9910,8 @@
           </a:p>
         </p:txBody>
       </p:sp>
-      <mc:AlternateContent xmlns:mc="http://schemas.openxmlformats.org/markup-compatibility/2006">
-        <mc:Choice xmlns:a14="http://schemas.microsoft.com/office/drawing/2010/main" Requires="a14">
+      <mc:AlternateContent xmlns:mc="http://schemas.openxmlformats.org/markup-compatibility/2006" xmlns:a14="http://schemas.microsoft.com/office/drawing/2010/main">
+        <mc:Choice Requires="a14">
           <p:sp>
             <p:nvSpPr>
               <p:cNvPr id="6" name="テキスト ボックス 5">
@@ -10516,7 +10504,7 @@
             </p:txBody>
           </p:sp>
         </mc:Choice>
-        <mc:Fallback>
+        <mc:Fallback xmlns="">
           <p:sp>
             <p:nvSpPr>
               <p:cNvPr id="6" name="テキスト ボックス 5">

--- a/ゲーム科2年/00_前期/ゲーム開発Ⅲ/ゲーム物理学/座学/27_回転運動.pptx
+++ b/ゲーム科2年/00_前期/ゲーム開発Ⅲ/ゲーム物理学/座学/27_回転運動.pptx
@@ -270,7 +270,7 @@
           <a:p>
             <a:fld id="{E9CC885B-4903-4D54-9A93-00025F12DED9}" type="datetimeFigureOut">
               <a:rPr kumimoji="1" lang="ja-JP" altLang="en-US" smtClean="0"/>
-              <a:t>2025/11/4</a:t>
+              <a:t>2025/11/12</a:t>
             </a:fld>
             <a:endParaRPr kumimoji="1" lang="ja-JP" altLang="en-US"/>
           </a:p>
@@ -500,7 +500,7 @@
           <a:p>
             <a:fld id="{E9CC885B-4903-4D54-9A93-00025F12DED9}" type="datetimeFigureOut">
               <a:rPr kumimoji="1" lang="ja-JP" altLang="en-US" smtClean="0"/>
-              <a:t>2025/11/4</a:t>
+              <a:t>2025/11/12</a:t>
             </a:fld>
             <a:endParaRPr kumimoji="1" lang="ja-JP" altLang="en-US"/>
           </a:p>
@@ -740,7 +740,7 @@
           <a:p>
             <a:fld id="{E9CC885B-4903-4D54-9A93-00025F12DED9}" type="datetimeFigureOut">
               <a:rPr kumimoji="1" lang="ja-JP" altLang="en-US" smtClean="0"/>
-              <a:t>2025/11/4</a:t>
+              <a:t>2025/11/12</a:t>
             </a:fld>
             <a:endParaRPr kumimoji="1" lang="ja-JP" altLang="en-US"/>
           </a:p>
@@ -970,7 +970,7 @@
           <a:p>
             <a:fld id="{E9CC885B-4903-4D54-9A93-00025F12DED9}" type="datetimeFigureOut">
               <a:rPr kumimoji="1" lang="ja-JP" altLang="en-US" smtClean="0"/>
-              <a:t>2025/11/4</a:t>
+              <a:t>2025/11/12</a:t>
             </a:fld>
             <a:endParaRPr kumimoji="1" lang="ja-JP" altLang="en-US"/>
           </a:p>
@@ -1245,7 +1245,7 @@
           <a:p>
             <a:fld id="{E9CC885B-4903-4D54-9A93-00025F12DED9}" type="datetimeFigureOut">
               <a:rPr kumimoji="1" lang="ja-JP" altLang="en-US" smtClean="0"/>
-              <a:t>2025/11/4</a:t>
+              <a:t>2025/11/12</a:t>
             </a:fld>
             <a:endParaRPr kumimoji="1" lang="ja-JP" altLang="en-US"/>
           </a:p>
@@ -1574,7 +1574,7 @@
           <a:p>
             <a:fld id="{E9CC885B-4903-4D54-9A93-00025F12DED9}" type="datetimeFigureOut">
               <a:rPr kumimoji="1" lang="ja-JP" altLang="en-US" smtClean="0"/>
-              <a:t>2025/11/4</a:t>
+              <a:t>2025/11/12</a:t>
             </a:fld>
             <a:endParaRPr kumimoji="1" lang="ja-JP" altLang="en-US"/>
           </a:p>
@@ -2050,7 +2050,7 @@
           <a:p>
             <a:fld id="{E9CC885B-4903-4D54-9A93-00025F12DED9}" type="datetimeFigureOut">
               <a:rPr kumimoji="1" lang="ja-JP" altLang="en-US" smtClean="0"/>
-              <a:t>2025/11/4</a:t>
+              <a:t>2025/11/12</a:t>
             </a:fld>
             <a:endParaRPr kumimoji="1" lang="ja-JP" altLang="en-US"/>
           </a:p>
@@ -2191,7 +2191,7 @@
           <a:p>
             <a:fld id="{E9CC885B-4903-4D54-9A93-00025F12DED9}" type="datetimeFigureOut">
               <a:rPr kumimoji="1" lang="ja-JP" altLang="en-US" smtClean="0"/>
-              <a:t>2025/11/4</a:t>
+              <a:t>2025/11/12</a:t>
             </a:fld>
             <a:endParaRPr kumimoji="1" lang="ja-JP" altLang="en-US"/>
           </a:p>
@@ -2304,7 +2304,7 @@
           <a:p>
             <a:fld id="{E9CC885B-4903-4D54-9A93-00025F12DED9}" type="datetimeFigureOut">
               <a:rPr kumimoji="1" lang="ja-JP" altLang="en-US" smtClean="0"/>
-              <a:t>2025/11/4</a:t>
+              <a:t>2025/11/12</a:t>
             </a:fld>
             <a:endParaRPr kumimoji="1" lang="ja-JP" altLang="en-US"/>
           </a:p>
@@ -2647,7 +2647,7 @@
           <a:p>
             <a:fld id="{E9CC885B-4903-4D54-9A93-00025F12DED9}" type="datetimeFigureOut">
               <a:rPr kumimoji="1" lang="ja-JP" altLang="en-US" smtClean="0"/>
-              <a:t>2025/11/4</a:t>
+              <a:t>2025/11/12</a:t>
             </a:fld>
             <a:endParaRPr kumimoji="1" lang="ja-JP" altLang="en-US"/>
           </a:p>
@@ -2935,7 +2935,7 @@
           <a:p>
             <a:fld id="{E9CC885B-4903-4D54-9A93-00025F12DED9}" type="datetimeFigureOut">
               <a:rPr kumimoji="1" lang="ja-JP" altLang="en-US" smtClean="0"/>
-              <a:t>2025/11/4</a:t>
+              <a:t>2025/11/12</a:t>
             </a:fld>
             <a:endParaRPr kumimoji="1" lang="ja-JP" altLang="en-US"/>
           </a:p>
@@ -3208,7 +3208,7 @@
           <a:p>
             <a:fld id="{E9CC885B-4903-4D54-9A93-00025F12DED9}" type="datetimeFigureOut">
               <a:rPr kumimoji="1" lang="ja-JP" altLang="en-US" smtClean="0"/>
-              <a:t>2025/11/4</a:t>
+              <a:t>2025/11/12</a:t>
             </a:fld>
             <a:endParaRPr kumimoji="1" lang="ja-JP" altLang="en-US"/>
           </a:p>
@@ -3676,7 +3676,7 @@
         <p:spPr>
           <a:xfrm>
             <a:off x="567542" y="1216429"/>
-            <a:ext cx="9110186" cy="4154984"/>
+            <a:ext cx="9417963" cy="3785652"/>
           </a:xfrm>
           <a:prstGeom prst="rect">
             <a:avLst/>
@@ -3708,18 +3708,15 @@
           <a:p>
             <a:r>
               <a:rPr lang="ja-JP" altLang="en-US" sz="2400" dirty="0"/>
-              <a:t>ビリヤードの玉を打つ場面をイメージしましょう。</a:t>
+              <a:t>ビリヤードの手玉を打つ場面をイメージしましょう。</a:t>
             </a:r>
             <a:endParaRPr lang="en-US" altLang="ja-JP" sz="2400" dirty="0"/>
           </a:p>
           <a:p>
             <a:r>
               <a:rPr lang="ja-JP" altLang="en-US" sz="2400" dirty="0"/>
-              <a:t>スティックの位置が少しずれると、</a:t>
-            </a:r>
-            <a:endParaRPr lang="en-US" altLang="ja-JP" sz="2400" dirty="0"/>
-          </a:p>
-          <a:p>
+              <a:t>スティックの位置が少しずれると、手玉には</a:t>
+            </a:r>
             <a:r>
               <a:rPr lang="ja-JP" altLang="en-US" sz="2400" b="1" dirty="0">
                 <a:solidFill>
@@ -3730,7 +3727,7 @@
             </a:r>
             <a:r>
               <a:rPr lang="ja-JP" altLang="en-US" sz="2400" dirty="0"/>
-              <a:t>がかかり、玉の進む方向がずれていきます。</a:t>
+              <a:t>がかかります。</a:t>
             </a:r>
             <a:endParaRPr lang="en-US" altLang="ja-JP" sz="2400" dirty="0"/>
           </a:p>
@@ -8677,8 +8674,8 @@
           </a:p>
         </p:txBody>
       </p:sp>
-      <mc:AlternateContent xmlns:mc="http://schemas.openxmlformats.org/markup-compatibility/2006">
-        <mc:Choice xmlns:a14="http://schemas.microsoft.com/office/drawing/2010/main" Requires="a14">
+      <mc:AlternateContent xmlns:mc="http://schemas.openxmlformats.org/markup-compatibility/2006" xmlns:a14="http://schemas.microsoft.com/office/drawing/2010/main">
+        <mc:Choice Requires="a14">
           <p:sp>
             <p:nvSpPr>
               <p:cNvPr id="6" name="テキスト ボックス 5">
@@ -9008,7 +9005,7 @@
             </p:txBody>
           </p:sp>
         </mc:Choice>
-        <mc:Fallback>
+        <mc:Fallback xmlns="">
           <p:sp>
             <p:nvSpPr>
               <p:cNvPr id="6" name="テキスト ボックス 5">

--- a/ゲーム科2年/00_前期/ゲーム開発Ⅲ/ゲーム物理学/座学/27_回転運動.pptx
+++ b/ゲーム科2年/00_前期/ゲーム開発Ⅲ/ゲーム物理学/座学/27_回転運動.pptx
@@ -270,7 +270,7 @@
           <a:p>
             <a:fld id="{E9CC885B-4903-4D54-9A93-00025F12DED9}" type="datetimeFigureOut">
               <a:rPr kumimoji="1" lang="ja-JP" altLang="en-US" smtClean="0"/>
-              <a:t>2025/11/12</a:t>
+              <a:t>2025/11/18</a:t>
             </a:fld>
             <a:endParaRPr kumimoji="1" lang="ja-JP" altLang="en-US"/>
           </a:p>
@@ -500,7 +500,7 @@
           <a:p>
             <a:fld id="{E9CC885B-4903-4D54-9A93-00025F12DED9}" type="datetimeFigureOut">
               <a:rPr kumimoji="1" lang="ja-JP" altLang="en-US" smtClean="0"/>
-              <a:t>2025/11/12</a:t>
+              <a:t>2025/11/18</a:t>
             </a:fld>
             <a:endParaRPr kumimoji="1" lang="ja-JP" altLang="en-US"/>
           </a:p>
@@ -740,7 +740,7 @@
           <a:p>
             <a:fld id="{E9CC885B-4903-4D54-9A93-00025F12DED9}" type="datetimeFigureOut">
               <a:rPr kumimoji="1" lang="ja-JP" altLang="en-US" smtClean="0"/>
-              <a:t>2025/11/12</a:t>
+              <a:t>2025/11/18</a:t>
             </a:fld>
             <a:endParaRPr kumimoji="1" lang="ja-JP" altLang="en-US"/>
           </a:p>
@@ -970,7 +970,7 @@
           <a:p>
             <a:fld id="{E9CC885B-4903-4D54-9A93-00025F12DED9}" type="datetimeFigureOut">
               <a:rPr kumimoji="1" lang="ja-JP" altLang="en-US" smtClean="0"/>
-              <a:t>2025/11/12</a:t>
+              <a:t>2025/11/18</a:t>
             </a:fld>
             <a:endParaRPr kumimoji="1" lang="ja-JP" altLang="en-US"/>
           </a:p>
@@ -1245,7 +1245,7 @@
           <a:p>
             <a:fld id="{E9CC885B-4903-4D54-9A93-00025F12DED9}" type="datetimeFigureOut">
               <a:rPr kumimoji="1" lang="ja-JP" altLang="en-US" smtClean="0"/>
-              <a:t>2025/11/12</a:t>
+              <a:t>2025/11/18</a:t>
             </a:fld>
             <a:endParaRPr kumimoji="1" lang="ja-JP" altLang="en-US"/>
           </a:p>
@@ -1574,7 +1574,7 @@
           <a:p>
             <a:fld id="{E9CC885B-4903-4D54-9A93-00025F12DED9}" type="datetimeFigureOut">
               <a:rPr kumimoji="1" lang="ja-JP" altLang="en-US" smtClean="0"/>
-              <a:t>2025/11/12</a:t>
+              <a:t>2025/11/18</a:t>
             </a:fld>
             <a:endParaRPr kumimoji="1" lang="ja-JP" altLang="en-US"/>
           </a:p>
@@ -2050,7 +2050,7 @@
           <a:p>
             <a:fld id="{E9CC885B-4903-4D54-9A93-00025F12DED9}" type="datetimeFigureOut">
               <a:rPr kumimoji="1" lang="ja-JP" altLang="en-US" smtClean="0"/>
-              <a:t>2025/11/12</a:t>
+              <a:t>2025/11/18</a:t>
             </a:fld>
             <a:endParaRPr kumimoji="1" lang="ja-JP" altLang="en-US"/>
           </a:p>
@@ -2191,7 +2191,7 @@
           <a:p>
             <a:fld id="{E9CC885B-4903-4D54-9A93-00025F12DED9}" type="datetimeFigureOut">
               <a:rPr kumimoji="1" lang="ja-JP" altLang="en-US" smtClean="0"/>
-              <a:t>2025/11/12</a:t>
+              <a:t>2025/11/18</a:t>
             </a:fld>
             <a:endParaRPr kumimoji="1" lang="ja-JP" altLang="en-US"/>
           </a:p>
@@ -2304,7 +2304,7 @@
           <a:p>
             <a:fld id="{E9CC885B-4903-4D54-9A93-00025F12DED9}" type="datetimeFigureOut">
               <a:rPr kumimoji="1" lang="ja-JP" altLang="en-US" smtClean="0"/>
-              <a:t>2025/11/12</a:t>
+              <a:t>2025/11/18</a:t>
             </a:fld>
             <a:endParaRPr kumimoji="1" lang="ja-JP" altLang="en-US"/>
           </a:p>
@@ -2647,7 +2647,7 @@
           <a:p>
             <a:fld id="{E9CC885B-4903-4D54-9A93-00025F12DED9}" type="datetimeFigureOut">
               <a:rPr kumimoji="1" lang="ja-JP" altLang="en-US" smtClean="0"/>
-              <a:t>2025/11/12</a:t>
+              <a:t>2025/11/18</a:t>
             </a:fld>
             <a:endParaRPr kumimoji="1" lang="ja-JP" altLang="en-US"/>
           </a:p>
@@ -2935,7 +2935,7 @@
           <a:p>
             <a:fld id="{E9CC885B-4903-4D54-9A93-00025F12DED9}" type="datetimeFigureOut">
               <a:rPr kumimoji="1" lang="ja-JP" altLang="en-US" smtClean="0"/>
-              <a:t>2025/11/12</a:t>
+              <a:t>2025/11/18</a:t>
             </a:fld>
             <a:endParaRPr kumimoji="1" lang="ja-JP" altLang="en-US"/>
           </a:p>
@@ -3208,7 +3208,7 @@
           <a:p>
             <a:fld id="{E9CC885B-4903-4D54-9A93-00025F12DED9}" type="datetimeFigureOut">
               <a:rPr kumimoji="1" lang="ja-JP" altLang="en-US" smtClean="0"/>
-              <a:t>2025/11/12</a:t>
+              <a:t>2025/11/18</a:t>
             </a:fld>
             <a:endParaRPr kumimoji="1" lang="ja-JP" altLang="en-US"/>
           </a:p>
@@ -3846,8 +3846,8 @@
           </a:p>
         </p:txBody>
       </p:sp>
-      <mc:AlternateContent xmlns:mc="http://schemas.openxmlformats.org/markup-compatibility/2006" xmlns:a14="http://schemas.microsoft.com/office/drawing/2010/main">
-        <mc:Choice Requires="a14">
+      <mc:AlternateContent xmlns:mc="http://schemas.openxmlformats.org/markup-compatibility/2006">
+        <mc:Choice xmlns:a14="http://schemas.microsoft.com/office/drawing/2010/main" Requires="a14">
           <p:sp>
             <p:nvSpPr>
               <p:cNvPr id="6" name="テキスト ボックス 5">
@@ -3863,7 +3863,7 @@
             <p:spPr>
               <a:xfrm>
                 <a:off x="567542" y="1216429"/>
-                <a:ext cx="10986341" cy="2377702"/>
+                <a:ext cx="11294117" cy="2377702"/>
               </a:xfrm>
               <a:prstGeom prst="rect">
                 <a:avLst/>
@@ -3885,7 +3885,7 @@
               <a:p>
                 <a:r>
                   <a:rPr lang="ja-JP" altLang="en-US" sz="2400" dirty="0"/>
-                  <a:t>ルーレットの各加速度は</a:t>
+                  <a:t>ルーレットの角加速度は</a:t>
                 </a:r>
                 <a14:m>
                   <m:oMath xmlns:m="http://schemas.openxmlformats.org/officeDocument/2006/math">
@@ -4045,7 +4045,7 @@
             </p:txBody>
           </p:sp>
         </mc:Choice>
-        <mc:Fallback xmlns="">
+        <mc:Fallback>
           <p:sp>
             <p:nvSpPr>
               <p:cNvPr id="6" name="テキスト ボックス 5">
@@ -4063,7 +4063,7 @@
             <p:spPr>
               <a:xfrm>
                 <a:off x="567542" y="1216429"/>
-                <a:ext cx="10986341" cy="2377702"/>
+                <a:ext cx="11294117" cy="2377702"/>
               </a:xfrm>
               <a:prstGeom prst="rect">
                 <a:avLst/>
@@ -4071,7 +4071,7 @@
               <a:blipFill>
                 <a:blip r:embed="rId2"/>
                 <a:stretch>
-                  <a:fillRect l="-832" t="-2051" b="-4872"/>
+                  <a:fillRect l="-809" t="-2051" b="-4872"/>
                 </a:stretch>
               </a:blipFill>
             </p:spPr>

--- a/ゲーム科2年/00_前期/ゲーム開発Ⅲ/ゲーム物理学/座学/27_回転運動.pptx
+++ b/ゲーム科2年/00_前期/ゲーム開発Ⅲ/ゲーム物理学/座学/27_回転運動.pptx
@@ -3846,8 +3846,8 @@
           </a:p>
         </p:txBody>
       </p:sp>
-      <mc:AlternateContent xmlns:mc="http://schemas.openxmlformats.org/markup-compatibility/2006">
-        <mc:Choice xmlns:a14="http://schemas.microsoft.com/office/drawing/2010/main" Requires="a14">
+      <mc:AlternateContent xmlns:mc="http://schemas.openxmlformats.org/markup-compatibility/2006" xmlns:a14="http://schemas.microsoft.com/office/drawing/2010/main">
+        <mc:Choice Requires="a14">
           <p:sp>
             <p:nvSpPr>
               <p:cNvPr id="6" name="テキスト ボックス 5">
@@ -4045,7 +4045,7 @@
             </p:txBody>
           </p:sp>
         </mc:Choice>
-        <mc:Fallback>
+        <mc:Fallback xmlns="">
           <p:sp>
             <p:nvSpPr>
               <p:cNvPr id="6" name="テキスト ボックス 5">
@@ -4682,8 +4682,8 @@
           </a:p>
         </p:txBody>
       </p:sp>
-      <mc:AlternateContent xmlns:mc="http://schemas.openxmlformats.org/markup-compatibility/2006" xmlns:a14="http://schemas.microsoft.com/office/drawing/2010/main">
-        <mc:Choice Requires="a14">
+      <mc:AlternateContent xmlns:mc="http://schemas.openxmlformats.org/markup-compatibility/2006">
+        <mc:Choice xmlns:a14="http://schemas.microsoft.com/office/drawing/2010/main" Requires="a14">
           <p:sp>
             <p:nvSpPr>
               <p:cNvPr id="6" name="テキスト ボックス 5">
@@ -4699,7 +4699,7 @@
             <p:spPr>
               <a:xfrm>
                 <a:off x="567542" y="1216429"/>
-                <a:ext cx="10986341" cy="3420808"/>
+                <a:ext cx="11294117" cy="3451971"/>
               </a:xfrm>
               <a:prstGeom prst="rect">
                 <a:avLst/>
@@ -4720,8 +4720,12 @@
               </a:p>
               <a:p>
                 <a:r>
+                  <a:rPr lang="ja-JP" altLang="en-US" sz="2400"/>
+                  <a:t>ルーレットの角加速度</a:t>
+                </a:r>
+                <a:r>
                   <a:rPr lang="ja-JP" altLang="en-US" sz="2400" dirty="0"/>
-                  <a:t>ルーレットの各加速度は</a:t>
+                  <a:t>は</a:t>
                 </a:r>
                 <a14:m>
                   <m:oMath xmlns:m="http://schemas.openxmlformats.org/officeDocument/2006/math">
@@ -5253,7 +5257,7 @@
             </p:txBody>
           </p:sp>
         </mc:Choice>
-        <mc:Fallback xmlns="">
+        <mc:Fallback>
           <p:sp>
             <p:nvSpPr>
               <p:cNvPr id="6" name="テキスト ボックス 5">
@@ -5271,7 +5275,7 @@
             <p:spPr>
               <a:xfrm>
                 <a:off x="567542" y="1216429"/>
-                <a:ext cx="10986341" cy="3420808"/>
+                <a:ext cx="11294117" cy="3451971"/>
               </a:xfrm>
               <a:prstGeom prst="rect">
                 <a:avLst/>
@@ -5279,7 +5283,7 @@
               <a:blipFill>
                 <a:blip r:embed="rId2"/>
                 <a:stretch>
-                  <a:fillRect l="-832" t="-1426"/>
+                  <a:fillRect l="-809" t="-1413"/>
                 </a:stretch>
               </a:blipFill>
             </p:spPr>
